--- a/content/decks/pre-a-level-art-design/pal-intro-02-the-media-of-the-course.pptx
+++ b/content/decks/pre-a-level-art-design/pal-intro-02-the-media-of-the-course.pptx
@@ -2179,7 +2179,7 @@
       </p:grpSpPr>
       <p:pic>
         <p:nvPicPr>
-          <p:cNvPr id="2" name="Image 0" descr="/private/tmp/claude-501/-Users-dogan-Documents-Vaults-Courses/3954bcc8-cc8d-4110-bd5a-74962061a805/scratchpad/decks/img/crops/muybridge-foreshortenings_a691.jpg">    </p:cNvPr>
+          <p:cNvPr id="2" name="Image 0" descr="/Users/dogan/Documents/Vaults/Courses/wiki/classes/pre-a-level-art-design/decks/_build/img/crops/muybridge-foreshortenings_a691.jpg">    </p:cNvPr>
           <p:cNvPicPr>
             <a:picLocks noChangeAspect="1"/>
           </p:cNvPicPr>
@@ -2435,7 +2435,7 @@
       </p:grpSpPr>
       <p:pic>
         <p:nvPicPr>
-          <p:cNvPr id="2" name="Image 0" descr="/private/tmp/claude-501/-Users-dogan-Documents-Vaults-Courses/3954bcc8-cc8d-4110-bd5a-74962061a805/scratchpad/decks/img/crops/mucha-cherry-blossom_a1777.jpg">    </p:cNvPr>
+          <p:cNvPr id="2" name="Image 0" descr="/Users/dogan/Documents/Vaults/Courses/wiki/classes/pre-a-level-art-design/decks/_build/img/crops/mucha-cherry-blossom_a1777.jpg">    </p:cNvPr>
           <p:cNvPicPr>
             <a:picLocks noChangeAspect="1"/>
           </p:cNvPicPr>
@@ -3954,7 +3954,7 @@
       </p:grpSpPr>
       <p:pic>
         <p:nvPicPr>
-          <p:cNvPr id="2" name="Image 0" descr="/private/tmp/claude-501/-Users-dogan-Documents-Vaults-Courses/3954bcc8-cc8d-4110-bd5a-74962061a805/scratchpad/decks/img/crops/repin-naked-sketch_a691.jpg">    </p:cNvPr>
+          <p:cNvPr id="2" name="Image 0" descr="/Users/dogan/Documents/Vaults/Courses/wiki/classes/pre-a-level-art-design/decks/_build/img/crops/repin-koni_a691.jpg">    </p:cNvPr>
           <p:cNvPicPr>
             <a:picLocks noChangeAspect="1"/>
           </p:cNvPicPr>
@@ -4011,7 +4011,7 @@
                 <a:ea typeface="Arial" pitchFamily="34" charset="-122"/>
                 <a:cs typeface="Arial" pitchFamily="34" charset="-120"/>
               </a:rPr>
-              <a:t>Ilya Repin, study. Public domain</a:t>
+              <a:t>Ilya Repin, Portrait of Anatoly Koni, 1897. Public domain</a:t>
             </a:r>
             <a:endParaRPr lang="en-US" sz="950" dirty="0"/>
           </a:p>
@@ -4802,7 +4802,7 @@
       </p:grpSpPr>
       <p:pic>
         <p:nvPicPr>
-          <p:cNvPr id="2" name="Image 0" descr="/private/tmp/claude-501/-Users-dogan-Documents-Vaults-Courses/3954bcc8-cc8d-4110-bd5a-74962061a805/scratchpad/decks/img/crops/rubens-head-old-man_a691.jpg">    </p:cNvPr>
+          <p:cNvPr id="2" name="Image 0" descr="/Users/dogan/Documents/Vaults/Courses/wiki/classes/pre-a-level-art-design/decks/_build/img/crops/rubens-head-old-man_a691.jpg">    </p:cNvPr>
           <p:cNvPicPr>
             <a:picLocks noChangeAspect="1"/>
           </p:cNvPicPr>
@@ -5236,7 +5236,7 @@
       </p:grpSpPr>
       <p:pic>
         <p:nvPicPr>
-          <p:cNvPr id="2" name="Image 0" descr="/private/tmp/claude-501/-Users-dogan-Documents-Vaults-Courses/3954bcc8-cc8d-4110-bd5a-74962061a805/scratchpad/decks/img/crops/atget-rue-mazet_a1777.jpg">    </p:cNvPr>
+          <p:cNvPr id="2" name="Image 0" descr="/Users/dogan/Documents/Vaults/Courses/wiki/classes/pre-a-level-art-design/decks/_build/img/crops/atget-rue-mazet_a1777.jpg">    </p:cNvPr>
           <p:cNvPicPr>
             <a:picLocks noChangeAspect="1"/>
           </p:cNvPicPr>
@@ -6261,7 +6261,7 @@
       </p:sp>
       <p:pic>
         <p:nvPicPr>
-          <p:cNvPr id="7" name="Image 0" descr="/private/tmp/claude-501/-Users-dogan-Documents-Vaults-Courses/3954bcc8-cc8d-4110-bd5a-74962061a805/scratchpad/decks/img/atget-rue-mazet.jpg">    </p:cNvPr>
+          <p:cNvPr id="7" name="Image 0" descr="/Users/dogan/Documents/Vaults/Courses/wiki/classes/pre-a-level-art-design/decks/_build/img/atget-rue-mazet.jpg">    </p:cNvPr>
           <p:cNvPicPr>
             <a:picLocks noChangeAspect="1"/>
           </p:cNvPicPr>
@@ -6310,7 +6310,7 @@
       </p:sp>
       <p:pic>
         <p:nvPicPr>
-          <p:cNvPr id="9" name="Image 1" descr="/private/tmp/claude-501/-Users-dogan-Documents-Vaults-Courses/3954bcc8-cc8d-4110-bd5a-74962061a805/scratchpad/decks/img/atget-rue-moliere.jpg">    </p:cNvPr>
+          <p:cNvPr id="9" name="Image 1" descr="/Users/dogan/Documents/Vaults/Courses/wiki/classes/pre-a-level-art-design/decks/_build/img/atget-rue-moliere.jpg">    </p:cNvPr>
           <p:cNvPicPr>
             <a:picLocks noChangeAspect="1"/>
           </p:cNvPicPr>
